--- a/hybrid-regulatory-dd-team/02-canvas/Digital Mindset Canvas.pptx
+++ b/hybrid-regulatory-dd-team/02-canvas/Digital Mindset Canvas.pptx
@@ -5905,7 +5905,7 @@
                 </a:solidFill>
                 <a:latin typeface="Figtree"/>
               </a:rPr>
-              <a:t>Canvas © Reichart Effectiveness Solutions 2024  |  Moab Digital Accelerator, Oct 7, 2026</a:t>
+              <a:t>Canvas © Reichart Effectiveness Solutions 2024  |  Digital Accelerator, Oct 7, 2026</a:t>
             </a:r>
           </a:p>
         </p:txBody>
